--- a/PMGSY_Project_Presentation_v2.pptx
+++ b/PMGSY_Project_Presentation_v2.pptx
@@ -2598,9 +2598,6 @@
           <a:bodyPr wrap="square" lIns="0" tIns="0" rIns="0" bIns="0" rtlCol="0" anchor="ctr"/>
           <a:lstStyle/>
           <a:p>
-            <a:pPr marL="0" indent="0">
-              <a:buNone/>
-            </a:pPr>
             <a:r>
               <a:rPr lang="en-US" sz="2000" b="1" dirty="0">
                 <a:solidFill>
@@ -2610,7 +2607,25 @@
                 <a:ea typeface="Arial" pitchFamily="34" charset="-122"/>
                 <a:cs typeface="Arial" pitchFamily="34" charset="-120"/>
               </a:rPr>
-              <a:t>Repository URL:  https://github.com/ahadgour/pmgsy-scheme-classification-ibm-autoai</a:t>
+              <a:t>Repository URL: </a:t>
+            </a:r>
+            <a:r>
+              <a:rPr lang="en-US" sz="2000" dirty="0" err="1">
+                <a:hlinkClick r:id="rId3"/>
+              </a:rPr>
+              <a:t>AhadGour</a:t>
+            </a:r>
+            <a:r>
+              <a:rPr lang="en-US" sz="2000" dirty="0">
+                <a:hlinkClick r:id="rId3"/>
+              </a:rPr>
+              <a:t>/PMGSY-Scheme-Classification-ML: Intelligent Classification of Rural Road Infrastructure Projects under PMGSY using Machine Learning - IBM Watson </a:t>
+            </a:r>
+            <a:r>
+              <a:rPr lang="en-US" sz="2000" dirty="0" err="1">
+                <a:hlinkClick r:id="rId3"/>
+              </a:rPr>
+              <a:t>AutoAI</a:t>
             </a:r>
             <a:endParaRPr lang="en-US" sz="2000" dirty="0"/>
           </a:p>
